--- a/library/b07-citation/b07-citation.pptx
+++ b/library/b07-citation/b07-citation.pptx
@@ -8376,7 +8376,7 @@
                 <a:ea typeface="Noto Sans KR" pitchFamily="34" charset="-122"/>
                 <a:cs typeface="Noto Sans KR" pitchFamily="34" charset="-120"/>
               </a:rPr>
-              <a:t>"이동훈과 송해덕(2016)은 팀 기반 학습의 부정적 측면을 상쇄하고자 사전 예방 중심의 적극적 교수 전략이 중요하다고 강조하였다."</a:t>
+              <a:t>"이동훈과 송해덕(2016)은 팀 학습에서 생기는 태만은 사후 평가가 아니라 교수자의 사전 대응으로 다뤄야 한다고 보았다."</a:t>
             </a:r>
             <a:endParaRPr lang="en-US" sz="1200" dirty="0"/>
           </a:p>
@@ -8784,7 +8784,7 @@
                 <a:ea typeface="Noto Sans KR" pitchFamily="34" charset="-122"/>
                 <a:cs typeface="Noto Sans KR" pitchFamily="34" charset="-120"/>
               </a:rPr>
-              <a:t>"이동훈과 송해덕(2016)은 결과 문책보다 교수자의 체계적 개입으로 문제 발생 자체를 차단하는 접근이 더 효과적이라 보았다."</a:t>
+              <a:t>"이동훈과 송해덕(2016)에 따르면, 태만을 점수로 벌하기보다 교수자가 일찍 개입해 태만이 생길 틈을 줄일 때 팀 학습이 살아난다."</a:t>
             </a:r>
             <a:endParaRPr lang="en-US" sz="1200" dirty="0"/>
           </a:p>
@@ -19222,7 +19222,7 @@
                 <a:ea typeface="Courier New" pitchFamily="34" charset="-122"/>
                 <a:cs typeface="Courier New" pitchFamily="34" charset="-120"/>
               </a:rPr>
-              <a:t>(John, 1975, as cited in Lily, 2005)</a:t>
+              <a:t>(Rivera, 1982, as cited in Moore, 2010)</a:t>
             </a:r>
             <a:endParaRPr lang="en-US" sz="1100" dirty="0"/>
           </a:p>
@@ -19261,7 +19261,7 @@
                 <a:ea typeface="Noto Sans KR" pitchFamily="34" charset="-122"/>
                 <a:cs typeface="Noto Sans KR" pitchFamily="34" charset="-120"/>
               </a:rPr>
-              <a:t>원저자(John)와 재인용자(Lily)를 모두 명시하며, 참고문헌에는 실제로 본 Lily의 문헌만 기재합니다.</a:t>
+              <a:t>원저자(Rivera)와 재인용자(Moore)를 모두 밝히고, 참고문헌에는 실제로 읽은 Moore의 문헌만 적습니다.</a:t>
             </a:r>
             <a:endParaRPr lang="en-US" sz="1200" dirty="0"/>
           </a:p>
@@ -19449,7 +19449,7 @@
                 <a:ea typeface="Courier New" pitchFamily="34" charset="-122"/>
                 <a:cs typeface="Courier New" pitchFamily="34" charset="-120"/>
               </a:rPr>
-              <a:t>(홍길동, 1990, 재인용: 김철수, 2020)</a:t>
+              <a:t>(박지호, 1993, 재인용: 이나래, 2021)</a:t>
             </a:r>
             <a:endParaRPr lang="en-US" sz="1100" dirty="0"/>
           </a:p>
@@ -19488,7 +19488,7 @@
                 <a:ea typeface="Noto Sans KR" pitchFamily="34" charset="-122"/>
                 <a:cs typeface="Noto Sans KR" pitchFamily="34" charset="-120"/>
               </a:rPr>
-              <a:t>'재인용'임을 분명히 밝히고, 내가 직접 읽은 2차 자료(김철수)의 출처 정보를 정확히 제공해야 합니다.</a:t>
+              <a:t>'재인용'임을 분명히 밝히고, 내가 직접 읽은 2차 자료(이나래)의 출처 정보를 정확히 제공해야 합니다.</a:t>
             </a:r>
             <a:endParaRPr lang="en-US" sz="1200" dirty="0"/>
           </a:p>
@@ -32189,7 +32189,7 @@
                 <a:ea typeface="Noto Sans KR" pitchFamily="34" charset="-122"/>
                 <a:cs typeface="Noto Sans KR" pitchFamily="34" charset="-120"/>
               </a:rPr>
-              <a:t>인용의 10가지 원칙 (1/2)</a:t>
+              <a:t>인용의 12가지 원칙 (1/2)</a:t>
             </a:r>
             <a:endParaRPr lang="en-US" sz="3600" dirty="0"/>
           </a:p>
@@ -32306,7 +32306,7 @@
                 <a:ea typeface="Noto Sans KR" pitchFamily="34" charset="-122"/>
                 <a:cs typeface="Noto Sans KR" pitchFamily="34" charset="-120"/>
               </a:rPr>
-              <a:t>학술적 가치가 충분한 자료만 인용하며, 신빙성이 낮거나 출처가 불분명한 부정확한 자료는 배제합니다.</a:t>
+              <a:t>누가 썼는지, 어디에 실렸는지 확인되는 자료를 고릅니다. 작성자나 근거를 알 수 없는 글은 근거로 쓰지 않습니다.</a:t>
             </a:r>
             <a:endParaRPr lang="en-US" sz="1000" dirty="0"/>
           </a:p>
@@ -32384,7 +32384,7 @@
                 <a:ea typeface="Noto Sans KR" pitchFamily="34" charset="-122"/>
                 <a:cs typeface="Noto Sans KR" pitchFamily="34" charset="-120"/>
               </a:rPr>
-              <a:t>상식에 해당하는 일반 지식이 아닌 한, 인용한 모든 아이디어와 문장에 대해 출처를 분명히 밝혀야 합니다.</a:t>
+              <a:t>누구나 아는 사실이 아니라면, 남에게서 얻은 생각·문장·사실 정보에는 빠짐없이 출처를 붙입니다.</a:t>
             </a:r>
             <a:endParaRPr lang="en-US" sz="1000" dirty="0"/>
           </a:p>
@@ -32462,7 +32462,7 @@
                 <a:ea typeface="Noto Sans KR" pitchFamily="34" charset="-122"/>
                 <a:cs typeface="Noto Sans KR" pitchFamily="34" charset="-120"/>
               </a:rPr>
-              <a:t>글뿐만 아니라 통계, 도표, 그림, 데이터 등 타인의 저작물을 활용한 모든 경우에 출처를 표기합니다.</a:t>
+              <a:t>문장만이 아닙니다. 남이 만든 표·그래프·사진·수치를 가져왔을 때도 그 아래에 출처를 적습니다.</a:t>
             </a:r>
             <a:endParaRPr lang="en-US" sz="1000" dirty="0"/>
           </a:p>
@@ -32540,7 +32540,7 @@
                 <a:ea typeface="Noto Sans KR" pitchFamily="34" charset="-122"/>
                 <a:cs typeface="Noto Sans KR" pitchFamily="34" charset="-120"/>
               </a:rPr>
-              <a:t>직접 인용은 원문의 표현 가치가 높을 때만 제한적으로 사용하며, 단순히 요약의 수고를 덜기 위해 사용하지 않습니다.</a:t>
+              <a:t>원문 그대로 옮기는 것은 그 표현이 꼭 필요할 때만 합니다. 요약하기 번거로워서 통째로 옮기는 것은 피합니다.</a:t>
             </a:r>
             <a:endParaRPr lang="en-US" sz="1000" dirty="0"/>
           </a:p>
@@ -32618,7 +32618,7 @@
                 <a:ea typeface="Noto Sans KR" pitchFamily="34" charset="-122"/>
                 <a:cs typeface="Noto Sans KR" pitchFamily="34" charset="-120"/>
               </a:rPr>
-              <a:t>비교적 긴 블록 인용을 할 경우, 인용문 제시 전후에 인용의 맥락 설명과 해석, 논평을 충분히 덧붙입니다.</a:t>
+              <a:t>몇 줄이 넘는 인용문을 넣었다면, 앞에서는 왜 이 글을 가져왔는지 밝히고 뒤에서는 내가 어떻게 읽었는지 덧붙입니다.</a:t>
             </a:r>
             <a:endParaRPr lang="en-US" sz="1000" dirty="0"/>
           </a:p>
@@ -32696,7 +32696,7 @@
                 <a:ea typeface="Noto Sans KR" pitchFamily="34" charset="-122"/>
                 <a:cs typeface="Noto Sans KR" pitchFamily="34" charset="-120"/>
               </a:rPr>
-              <a:t>바꿔쓰기(Paraphrasing)를 할 때는 원문의 내용을 충분히 이해한 후, 원문을 보지 않고 자신의 문장으로 새롭게 씁니다.</a:t>
+              <a:t>바꿔 쓰기 전에 원문을 남에게 설명할 수 있을 만큼 이해합니다. 그다음 원문을 덮고 내 문장으로 다시 씁니다.</a:t>
             </a:r>
             <a:endParaRPr lang="en-US" sz="1000" dirty="0"/>
           </a:p>
@@ -32823,7 +32823,43 @@
       </p:sp>
       <p:sp>
         <p:nvSpPr>
-          <p:cNvPr id="45" name="deckgen:wrap:footer"/>
+          <p:cNvPr id="45" name="Stage5 Source Note"/>
+          <p:cNvSpPr txBox="1"/>
+          <p:nvPr/>
+        </p:nvSpPr>
+        <p:spPr>
+          <a:xfrm>
+            <a:off x="761695" y="6580000"/>
+            <a:ext cx="10668305" cy="200000"/>
+          </a:xfrm>
+          <a:prstGeom prst="rect">
+            <a:avLst/>
+          </a:prstGeom>
+          <a:noFill/>
+        </p:spPr>
+        <p:txBody>
+          <a:bodyPr wrap="square" lIns="0" rIns="0" tIns="0" bIns="0">
+            <a:spAutoFit/>
+          </a:bodyPr>
+          <a:lstStyle/>
+          <a:p>
+            <a:r>
+              <a:rPr sz="900">
+                <a:solidFill>
+                  <a:srgbClr val="9AA3B2"/>
+                </a:solidFill>
+                <a:latin typeface="Noto Sans KR"/>
+                <a:ea typeface="Noto Sans KR"/>
+                <a:cs typeface="Noto Sans KR"/>
+              </a:rPr>
+              <a:t>인용 원칙의 틀은 DBpia 「대학생을 위한 인용 관리 방법」(2025)을 참고해 재구성</a:t>
+            </a:r>
+          </a:p>
+        </p:txBody>
+      </p:sp>
+      <p:sp>
+        <p:nvSpPr>
+          <p:cNvPr id="46" name="deckgen:wrap:footer"/>
           <p:cNvSpPr txBox="1"/>
           <p:nvPr/>
         </p:nvSpPr>
@@ -35530,7 +35566,7 @@
                 <a:ea typeface="Noto Sans KR" pitchFamily="34" charset="-122"/>
                 <a:cs typeface="Noto Sans KR" pitchFamily="34" charset="-120"/>
               </a:rPr>
-              <a:t>인용의 10가지 원칙 (2/2)</a:t>
+              <a:t>인용의 12가지 원칙 (2/2)</a:t>
             </a:r>
             <a:endParaRPr lang="en-US" sz="3600" dirty="0"/>
           </a:p>
@@ -35647,7 +35683,7 @@
                 <a:ea typeface="Noto Sans KR" pitchFamily="34" charset="-122"/>
                 <a:cs typeface="Noto Sans KR" pitchFamily="34" charset="-120"/>
               </a:rPr>
-              <a:t>자신의 논리에 맞추기 위해 원문의 본래 의도를 비틀지 않아야 합니다. 원작자의 맥락을 존중하세요.</a:t>
+              <a:t>내 주장에 유리한 부분만 잘라 원저자의 뜻과 다르게 쓰지 않습니다. 그 문장이 원문에서 하던 역할을 확인하세요.</a:t>
             </a:r>
             <a:endParaRPr lang="en-US" sz="1100" dirty="0"/>
           </a:p>
@@ -35725,7 +35761,7 @@
                 <a:ea typeface="Noto Sans KR" pitchFamily="34" charset="-122"/>
                 <a:cs typeface="Noto Sans KR" pitchFamily="34" charset="-120"/>
               </a:rPr>
-              <a:t>가능한 한 원문을 직접 찾아 확인하고 인용해야 합니다. 재인용은 원문을 구할 수 없을 때만 제한적으로 허용됩니다.</a:t>
+              <a:t>다른 글에 소개된 내용은 원문을 찾아 직접 읽고 씁니다. 원문을 끝내 구할 수 없을 때만 재인용으로 표기합니다.</a:t>
             </a:r>
             <a:endParaRPr lang="en-US" sz="1100" dirty="0"/>
           </a:p>
@@ -35803,7 +35839,7 @@
                 <a:ea typeface="Noto Sans KR" pitchFamily="34" charset="-122"/>
                 <a:cs typeface="Noto Sans KR" pitchFamily="34" charset="-120"/>
               </a:rPr>
-              <a:t>긴 블록 인용을 사용할 경우, 인용문 전후에 인용자의 해석과 논평을 충분히 덧붙여 주장을 뒷받침해야 합니다.</a:t>
+              <a:t>인용문만 길게 두면 독자는 왜 읽는지 모릅니다. 그 글이 내 주장의 어디를 받치는지 이어서 적으세요.</a:t>
             </a:r>
             <a:endParaRPr lang="en-US" sz="1100" dirty="0"/>
           </a:p>
@@ -35959,7 +35995,7 @@
                 <a:ea typeface="Noto Sans KR" pitchFamily="34" charset="-122"/>
                 <a:cs typeface="Noto Sans KR" pitchFamily="34" charset="-120"/>
               </a:rPr>
-              <a:t>요약이나 바꿔쓰기의 노고를 덜기 위한 단순 복사는 피하고, 표현적 가치가 높을 때만 직접 인용을 활용하세요.</a:t>
+              <a:t>따옴표로 옮긴 문장이 내 문장보다 많아지면 짜깁기가 됩니다. 옮길 가치가 있는 표현인지 먼저 따져 보세요.</a:t>
             </a:r>
             <a:endParaRPr lang="en-US" sz="1100" dirty="0"/>
           </a:p>
@@ -36164,7 +36200,43 @@
       </p:sp>
       <p:sp>
         <p:nvSpPr>
-          <p:cNvPr id="45" name="deckgen:wrap:footer"/>
+          <p:cNvPr id="45" name="Stage5 Source Note"/>
+          <p:cNvSpPr txBox="1"/>
+          <p:nvPr/>
+        </p:nvSpPr>
+        <p:spPr>
+          <a:xfrm>
+            <a:off x="761695" y="6500000"/>
+            <a:ext cx="10668305" cy="200000"/>
+          </a:xfrm>
+          <a:prstGeom prst="rect">
+            <a:avLst/>
+          </a:prstGeom>
+          <a:noFill/>
+        </p:spPr>
+        <p:txBody>
+          <a:bodyPr wrap="square" lIns="0" rIns="0" tIns="0" bIns="0">
+            <a:spAutoFit/>
+          </a:bodyPr>
+          <a:lstStyle/>
+          <a:p>
+            <a:r>
+              <a:rPr sz="900">
+                <a:solidFill>
+                  <a:srgbClr val="9AA3B2"/>
+                </a:solidFill>
+                <a:latin typeface="Noto Sans KR"/>
+                <a:ea typeface="Noto Sans KR"/>
+                <a:cs typeface="Noto Sans KR"/>
+              </a:rPr>
+              <a:t>인용 원칙의 틀은 DBpia 「대학생을 위한 인용 관리 방법」(2025)을 참고해 재구성</a:t>
+            </a:r>
+          </a:p>
+        </p:txBody>
+      </p:sp>
+      <p:sp>
+        <p:nvSpPr>
+          <p:cNvPr id="46" name="deckgen:wrap:footer"/>
           <p:cNvSpPr txBox="1"/>
           <p:nvPr/>
         </p:nvSpPr>
@@ -53946,7 +54018,7 @@
         <p:spPr>
           <a:xfrm>
             <a:off x="761695" y="1037844"/>
-            <a:ext cx="7592263" cy="667512"/>
+            <a:ext cx="10668305" cy="667512"/>
           </a:xfrm>
           <a:prstGeom prst="rect">
             <a:avLst/>
@@ -59095,29 +59167,7 @@
                 <a:ea typeface="Noto Sans KR" pitchFamily="34" charset="-122"/>
                 <a:cs typeface="Noto Sans KR" pitchFamily="34" charset="-120"/>
               </a:rPr>
-              <a:t>"우리 사회는 점점 고령화되고 </a:t>
-            </a:r>
-            <a:r>
-              <a:rPr lang="en-US" sz="1500" dirty="0" err="1">
-                <a:solidFill>
-                  <a:srgbClr val="E2E8F0"/>
-                </a:solidFill>
-                <a:latin typeface="Noto Sans KR" pitchFamily="34" charset="0"/>
-                <a:ea typeface="Noto Sans KR" pitchFamily="34" charset="-122"/>
-                <a:cs typeface="Noto Sans KR" pitchFamily="34" charset="-120"/>
-              </a:rPr>
-              <a:t>있으며</a:t>
-            </a:r>
-            <a:r>
-              <a:rPr lang="en-US" sz="1500" dirty="0">
-                <a:solidFill>
-                  <a:srgbClr val="E2E8F0"/>
-                </a:solidFill>
-                <a:latin typeface="Noto Sans KR" pitchFamily="34" charset="0"/>
-                <a:ea typeface="Noto Sans KR" pitchFamily="34" charset="-122"/>
-                <a:cs typeface="Noto Sans KR" pitchFamily="34" charset="-120"/>
-              </a:rPr>
-              <a:t> </a:t>
+              <a:t>"혼자 사는 대학생이 늘면서 끼니를 </a:t>
             </a:r>
           </a:p>
           <a:p>
@@ -59136,40 +59186,7 @@
                 <a:ea typeface="Noto Sans KR" pitchFamily="34" charset="-122"/>
                 <a:cs typeface="Noto Sans KR" pitchFamily="34" charset="-120"/>
               </a:rPr>
-              <a:t>그에</a:t>
-            </a:r>
-            <a:r>
-              <a:rPr lang="en-US" sz="1500" dirty="0">
-                <a:solidFill>
-                  <a:srgbClr val="E2E8F0"/>
-                </a:solidFill>
-                <a:latin typeface="Noto Sans KR" pitchFamily="34" charset="0"/>
-                <a:ea typeface="Noto Sans KR" pitchFamily="34" charset="-122"/>
-                <a:cs typeface="Noto Sans KR" pitchFamily="34" charset="-120"/>
-              </a:rPr>
-              <a:t> 따라 정부의 돌봄 제도나 </a:t>
-            </a:r>
-            <a:r>
-              <a:rPr lang="en-US" sz="1500" dirty="0" err="1">
-                <a:solidFill>
-                  <a:srgbClr val="E2E8F0"/>
-                </a:solidFill>
-                <a:latin typeface="Noto Sans KR" pitchFamily="34" charset="0"/>
-                <a:ea typeface="Noto Sans KR" pitchFamily="34" charset="-122"/>
-                <a:cs typeface="Noto Sans KR" pitchFamily="34" charset="-120"/>
-              </a:rPr>
-              <a:t>요양시설</a:t>
-            </a:r>
-            <a:r>
-              <a:rPr lang="en-US" sz="1500" dirty="0">
-                <a:solidFill>
-                  <a:srgbClr val="E2E8F0"/>
-                </a:solidFill>
-                <a:latin typeface="Noto Sans KR" pitchFamily="34" charset="0"/>
-                <a:ea typeface="Noto Sans KR" pitchFamily="34" charset="-122"/>
-                <a:cs typeface="Noto Sans KR" pitchFamily="34" charset="-120"/>
-              </a:rPr>
-              <a:t> </a:t>
+              <a:t>배달 음식으로 해결하는 일이 잦아졌고, </a:t>
             </a:r>
           </a:p>
           <a:p>
@@ -59188,18 +59205,7 @@
                 <a:ea typeface="Noto Sans KR" pitchFamily="34" charset="-122"/>
                 <a:cs typeface="Noto Sans KR" pitchFamily="34" charset="-120"/>
               </a:rPr>
-              <a:t>수요가</a:t>
-            </a:r>
-            <a:r>
-              <a:rPr lang="en-US" sz="1500" dirty="0">
-                <a:solidFill>
-                  <a:srgbClr val="E2E8F0"/>
-                </a:solidFill>
-                <a:latin typeface="Noto Sans KR" pitchFamily="34" charset="0"/>
-                <a:ea typeface="Noto Sans KR" pitchFamily="34" charset="-122"/>
-                <a:cs typeface="Noto Sans KR" pitchFamily="34" charset="-120"/>
-              </a:rPr>
-              <a:t> 빠르게 증가하고 있다."</a:t>
+              <a:t>그만큼 식비 부담도 커지고 있다."</a:t>
             </a:r>
             <a:endParaRPr lang="en-US" sz="1500" dirty="0"/>
           </a:p>
@@ -59531,29 +59537,7 @@
                 <a:ea typeface="Noto Sans KR" pitchFamily="34" charset="-122"/>
                 <a:cs typeface="Noto Sans KR" pitchFamily="34" charset="-120"/>
               </a:rPr>
-              <a:t>"우리 사회는 점점 고령화되고 </a:t>
-            </a:r>
-            <a:r>
-              <a:rPr lang="en-US" sz="1500" dirty="0" err="1">
-                <a:solidFill>
-                  <a:srgbClr val="E2E8F0"/>
-                </a:solidFill>
-                <a:latin typeface="Noto Sans KR" pitchFamily="34" charset="0"/>
-                <a:ea typeface="Noto Sans KR" pitchFamily="34" charset="-122"/>
-                <a:cs typeface="Noto Sans KR" pitchFamily="34" charset="-120"/>
-              </a:rPr>
-              <a:t>있으며</a:t>
-            </a:r>
-            <a:r>
-              <a:rPr lang="en-US" sz="1500" dirty="0">
-                <a:solidFill>
-                  <a:srgbClr val="E2E8F0"/>
-                </a:solidFill>
-                <a:latin typeface="Noto Sans KR" pitchFamily="34" charset="0"/>
-                <a:ea typeface="Noto Sans KR" pitchFamily="34" charset="-122"/>
-                <a:cs typeface="Noto Sans KR" pitchFamily="34" charset="-120"/>
-              </a:rPr>
-              <a:t> </a:t>
+              <a:t>"혼자 사는 대학생이 늘면서 끼니를 </a:t>
             </a:r>
           </a:p>
           <a:p>
@@ -59572,40 +59556,7 @@
                 <a:ea typeface="Noto Sans KR" pitchFamily="34" charset="-122"/>
                 <a:cs typeface="Noto Sans KR" pitchFamily="34" charset="-120"/>
               </a:rPr>
-              <a:t>그에</a:t>
-            </a:r>
-            <a:r>
-              <a:rPr lang="en-US" sz="1500" dirty="0">
-                <a:solidFill>
-                  <a:srgbClr val="E2E8F0"/>
-                </a:solidFill>
-                <a:latin typeface="Noto Sans KR" pitchFamily="34" charset="0"/>
-                <a:ea typeface="Noto Sans KR" pitchFamily="34" charset="-122"/>
-                <a:cs typeface="Noto Sans KR" pitchFamily="34" charset="-120"/>
-              </a:rPr>
-              <a:t> 따라 정부의 돌봄 제도나 요양시설 </a:t>
-            </a:r>
-            <a:r>
-              <a:rPr lang="en-US" sz="1500" dirty="0" err="1">
-                <a:solidFill>
-                  <a:srgbClr val="E2E8F0"/>
-                </a:solidFill>
-                <a:latin typeface="Noto Sans KR" pitchFamily="34" charset="0"/>
-                <a:ea typeface="Noto Sans KR" pitchFamily="34" charset="-122"/>
-                <a:cs typeface="Noto Sans KR" pitchFamily="34" charset="-120"/>
-              </a:rPr>
-              <a:t>수요가</a:t>
-            </a:r>
-            <a:r>
-              <a:rPr lang="en-US" sz="1500" dirty="0">
-                <a:solidFill>
-                  <a:srgbClr val="E2E8F0"/>
-                </a:solidFill>
-                <a:latin typeface="Noto Sans KR" pitchFamily="34" charset="0"/>
-                <a:ea typeface="Noto Sans KR" pitchFamily="34" charset="-122"/>
-                <a:cs typeface="Noto Sans KR" pitchFamily="34" charset="-120"/>
-              </a:rPr>
-              <a:t> </a:t>
+              <a:t>배달 음식으로 해결하는 일이 잦아졌고, </a:t>
             </a:r>
           </a:p>
           <a:p>
@@ -59624,18 +59575,7 @@
                 <a:ea typeface="Noto Sans KR" pitchFamily="34" charset="-122"/>
                 <a:cs typeface="Noto Sans KR" pitchFamily="34" charset="-120"/>
               </a:rPr>
-              <a:t>빠르게</a:t>
-            </a:r>
-            <a:r>
-              <a:rPr lang="en-US" sz="1500" dirty="0">
-                <a:solidFill>
-                  <a:srgbClr val="E2E8F0"/>
-                </a:solidFill>
-                <a:latin typeface="Noto Sans KR" pitchFamily="34" charset="0"/>
-                <a:ea typeface="Noto Sans KR" pitchFamily="34" charset="-122"/>
-                <a:cs typeface="Noto Sans KR" pitchFamily="34" charset="-120"/>
-              </a:rPr>
-              <a:t> 증가하고 있다 (김철수, 2024)."</a:t>
+              <a:t>식비 부담도 커지고 있다 (이나래, 2024)."</a:t>
             </a:r>
             <a:endParaRPr lang="en-US" sz="1500" dirty="0"/>
           </a:p>
@@ -59742,7 +59682,7 @@
                 <a:ea typeface="Noto Sans KR" pitchFamily="34" charset="-122"/>
                 <a:cs typeface="Noto Sans KR" pitchFamily="34" charset="-120"/>
               </a:rPr>
-              <a:t>* 문장 끝에 출처(저자, 연도)를 명확히 표기하여 인용임을 밝힘</a:t>
+              <a:t>* 문장 끝에 (저자, 연도)를 붙여 인용임을 밝힘 (가상의 예시)</a:t>
             </a:r>
             <a:endParaRPr lang="en-US" sz="1000" dirty="0"/>
           </a:p>

--- a/library/b07-citation/b07-citation.pptx
+++ b/library/b07-citation/b07-citation.pptx
@@ -53300,7 +53300,7 @@
                 </a:solidFill>
                 <a:latin typeface="Pretendard"/>
               </a:rPr>
-              <a:t>1.  저작권 © 2026 이애본(드림아이티비즈 DreamIT Biz). 발행 홍문원(洪文院, 출판사 신고번호 제2026-000026호). 2026년 1월 「생성형 AI와 창의력·복합문제능력 향상 과정」 강의안을 전자출판용으로 다시 묶은 것입니다. ISBN: 등록 후 기재.</a:t>
+              <a:t>1.  저작권 © 2026 이애본(드림아이티비즈 DreamIT Biz). 발행 홍문원(洪文院, 출판사 신고번호 제2026-000026호). 이애본이 2026년 대학·기관 강의 현장에서 쓴 강의안을 전자출판용으로 다시 묶은 것입니다. ISBN: 등록 후 기재.</a:t>
             </a:r>
           </a:p>
           <a:p>
